--- a/03-答辩PPT/综合实践III答辩PPT-单目标跟踪系统.pptx
+++ b/03-答辩PPT/综合实践III答辩PPT-单目标跟踪系统.pptx
@@ -3613,7 +3613,7 @@
                 <a:latin typeface="微软雅黑"/>
                 <a:ea typeface="微软雅黑"/>
               </a:rPr>
-              <a:t>▪ 管理端接口强制 ADMIN 角色（普通用户访问返回403）</a:t>
+              <a:t>▪ 管理端接口强制 ADMIN；任务详情/启动再校验归属（越权返回403）</a:t>
             </a:r>
           </a:p>
           <a:p>
@@ -3630,7 +3630,7 @@
                 <a:latin typeface="微软雅黑"/>
                 <a:ea typeface="微软雅黑"/>
               </a:rPr>
-              <a:t>▪ 上传 → 落盘 → 登记任务(PENDING) → 立即返回任务ID</a:t>
+              <a:t>▪ 两段式上传：defer=true 提首帧 → 前端框选 → /start 开始处理</a:t>
             </a:r>
           </a:p>
           <a:p>
@@ -3664,7 +3664,7 @@
                 <a:latin typeface="微软雅黑"/>
                 <a:ea typeface="微软雅黑"/>
               </a:rPr>
-              <a:t>▪ BCrypt 密码加密，密码字段不参与序列化</a:t>
+              <a:t>▪ BCrypt 密码加密，密码字段不参与序列化；视频/图片结果按类型落盘</a:t>
             </a:r>
           </a:p>
         </p:txBody>
@@ -3738,7 +3738,7 @@
                 <a:latin typeface="微软雅黑"/>
                 <a:ea typeface="微软雅黑"/>
               </a:rPr>
-              <a:t>▪ t_task：user_id/文件路径/bbox/status(PENDING·PROCESSING·SUCCESS·FAILED)/结果路径/stats_json/error_msg</a:t>
+              <a:t>▪ t_task：user_id/media_type(VIDEO·IMAGE)/文件路径/bbox/status(PENDING·PROCESSING·SUCCESS·FAILED)/结果路径/stats_json/error_msg</a:t>
             </a:r>
           </a:p>
           <a:p>
@@ -4022,7 +4022,7 @@
                 <a:latin typeface="微软雅黑"/>
                 <a:ea typeface="微软雅黑"/>
               </a:rPr>
-              <a:t>▪ utils/request.js 统一封装：自动携带 JWT、401 自动跳登录；wx.uploadFile 携带文件与 bbox</a:t>
+              <a:t>▪ 支持视频与图片素材；小程序无法取视频帧 → 后端提首帧，前端在图片上手指拖拽画框</a:t>
             </a:r>
           </a:p>
           <a:p>
@@ -4039,7 +4039,24 @@
                 <a:latin typeface="微软雅黑"/>
                 <a:ea typeface="微软雅黑"/>
               </a:rPr>
-              <a:t>▪ 结果页 1.5s 轮询任务状态，完成后播放结果视频并展示“丢失/恢复/FPS”统计</a:t>
+              <a:t>▪ 显示坐标按“原始尺寸/显示尺寸”换算回素材原始像素，保证所见即所框</a:t>
+            </a:r>
+          </a:p>
+          <a:p>
+            <a:pPr algn="l">
+              <a:spcAft>
+                <a:spcPts val="600"/>
+              </a:spcAft>
+            </a:pPr>
+            <a:r>
+              <a:rPr sz="1500" b="0">
+                <a:solidFill>
+                  <a:srgbClr val="1F2D3D"/>
+                </a:solidFill>
+                <a:latin typeface="微软雅黑"/>
+                <a:ea typeface="微软雅黑"/>
+              </a:rPr>
+              <a:t>▪ 结果页 1.5s 轮询任务状态，完成后播放结果视频（图片素材则展示结果图）与统计</a:t>
             </a:r>
           </a:p>
         </p:txBody>
@@ -4699,7 +4716,7 @@
                 <a:latin typeface="微软雅黑"/>
                 <a:ea typeface="微软雅黑"/>
               </a:rPr>
-              <a:t>浏览器直接打开 /track.html：把视频【拖拽】到网页或 Ctrl+V 粘贴，即可发起检测</a:t>
+              <a:t>浏览器直接打开 /track.html：把视频或图片【拖拽】到网页或 Ctrl+V 粘贴，即可发起检测</a:t>
             </a:r>
           </a:p>
           <a:p>
@@ -4716,7 +4733,24 @@
                 <a:latin typeface="微软雅黑"/>
                 <a:ea typeface="微软雅黑"/>
               </a:rPr>
-              <a:t>▪ 可提取首帧在画布上拖拽框选目标；处理完成后自动展示结果视频与“丢失/找回/FPS”统计</a:t>
+              <a:t>▪ 可提取视频首帧在画布上拖拽框选目标；图片本身即首帧，选好直接框选</a:t>
+            </a:r>
+          </a:p>
+          <a:p>
+            <a:pPr algn="l">
+              <a:spcAft>
+                <a:spcPts val="600"/>
+              </a:spcAft>
+            </a:pPr>
+            <a:r>
+              <a:rPr sz="1400" b="0">
+                <a:solidFill>
+                  <a:srgbClr val="1F2D3D"/>
+                </a:solidFill>
+                <a:latin typeface="微软雅黑"/>
+                <a:ea typeface="微软雅黑"/>
+              </a:rPr>
+              <a:t>▪ 处理完成后自动展示结果视频/结果图片与“丢失/找回/FPS”统计</a:t>
             </a:r>
           </a:p>
         </p:txBody>
@@ -5352,7 +5386,7 @@
                 <a:latin typeface="微软雅黑"/>
                 <a:ea typeface="微软雅黑"/>
               </a:rPr>
-              <a:t>功能测试（18 项用例全部通过）</a:t>
+              <a:t>功能测试（21 项用例全部通过）</a:t>
             </a:r>
           </a:p>
           <a:p>
@@ -5386,7 +5420,7 @@
                 <a:latin typeface="微软雅黑"/>
                 <a:ea typeface="微软雅黑"/>
               </a:rPr>
-              <a:t>▪ 上传：格式白名单、bbox 校验、异步处理 ✓</a:t>
+              <a:t>▪ 上传：格式白名单、bbox 校验、异步处理、图片素材链路 ✓</a:t>
             </a:r>
           </a:p>
           <a:p>
@@ -5403,7 +5437,7 @@
                 <a:latin typeface="微软雅黑"/>
                 <a:ea typeface="微软雅黑"/>
               </a:rPr>
-              <a:t>▪ 权限：普通用户访问管理端返回 403 ✓</a:t>
+              <a:t>▪ 权限：普通用户访问管理端 403；访问他人任务 403 ✓</a:t>
             </a:r>
           </a:p>
           <a:p>
@@ -5437,7 +5471,7 @@
                 <a:latin typeface="微软雅黑"/>
                 <a:ea typeface="微软雅黑"/>
               </a:rPr>
-              <a:t>▪ 结果：/files 结果视频可在线播放 ✓</a:t>
+              <a:t>▪ 结果：/files 结果视频可在线播放、结果图片可查看 ✓</a:t>
             </a:r>
           </a:p>
         </p:txBody>
@@ -5494,7 +5528,7 @@
                 <a:latin typeface="微软雅黑"/>
                 <a:ea typeface="微软雅黑"/>
               </a:rPr>
-              <a:t>▪ 场景A 简单运动：420帧全程跟踪，丢失0次 ✓</a:t>
+              <a:t>▪ 场景A 无遮挡 420帧：全程跟踪，丢失0次（约104 FPS）✓</a:t>
             </a:r>
           </a:p>
           <a:p>
@@ -5511,7 +5545,7 @@
                 <a:latin typeface="微软雅黑"/>
                 <a:ea typeface="微软雅黑"/>
               </a:rPr>
-              <a:t>▪ 场景B 完全遮挡~0.9s：丢失1次 → 自动找回1次 → 恢复跟踪 ✓</a:t>
+              <a:t>▪ 场景B 完全遮挡~0.9s：第199帧丢失 → 第262帧自动找回 → 恢复跟踪 ✓</a:t>
             </a:r>
           </a:p>
           <a:p>
@@ -5528,7 +5562,7 @@
                 <a:latin typeface="微软雅黑"/>
                 <a:ea typeface="微软雅黑"/>
               </a:rPr>
-              <a:t>▪ 场景C 轨迹完整：末帧跟踪框贴合目标 ✓</a:t>
+              <a:t>▪ 场景C 轨迹完整：恢复后跟踪框回到目标上，末帧仍 TRACKING ✓</a:t>
             </a:r>
           </a:p>
           <a:p>
@@ -5545,7 +5579,7 @@
                 <a:latin typeface="微软雅黑"/>
                 <a:ea typeface="微软雅黑"/>
               </a:rPr>
-              <a:t>▪ 性能：约 95~101 FPS（≥25FPS 实时要求）✓</a:t>
+              <a:t>▪ 图片链路：输出 *_tracked.jpg，media_type=IMAGE ✓</a:t>
             </a:r>
           </a:p>
           <a:p>
@@ -5562,7 +5596,7 @@
                 <a:latin typeface="微软雅黑"/>
                 <a:ea typeface="微软雅黑"/>
               </a:rPr>
-              <a:t>▪ 环境：Win11 / Java17 / MySQL8 / Python3.13+OpenCV4.10</a:t>
+              <a:t>▪ 环境：Win11 / JDK21 / H2内嵌库 / Python3.12+OpenCV4.11</a:t>
             </a:r>
           </a:p>
         </p:txBody>
@@ -6123,7 +6157,7 @@
                 <a:latin typeface="微软雅黑"/>
                 <a:ea typeface="微软雅黑"/>
               </a:rPr>
-              <a:t>▪ 三端联动、架构解耦：小程序 / Web管理端 / Python视觉服务 / MySQL+文件 完整闭环</a:t>
+              <a:t>▪ 三端联动、架构解耦：小程序 / Web管理端 / Python视觉服务 / 数据库+文件 完整闭环</a:t>
             </a:r>
           </a:p>
           <a:p>
@@ -6157,7 +6191,7 @@
                 <a:latin typeface="微软雅黑"/>
                 <a:ea typeface="微软雅黑"/>
               </a:rPr>
-              <a:t>▪ 工程化完整：JWT+角色鉴权、BCrypt、异步状态机、失败留痕、Git 协作、规范文档</a:t>
+              <a:t>▪ 素材完整：视频与图片同一链路处理，两端都支持首帧拖拽框选目标</a:t>
             </a:r>
           </a:p>
           <a:p>
@@ -6174,7 +6208,7 @@
                 <a:latin typeface="微软雅黑"/>
                 <a:ea typeface="微软雅黑"/>
               </a:rPr>
-              <a:t>▪ 轻量可复现：免深度学习训练，普通 PC 即可运行演示</a:t>
+              <a:t>▪ 工程化完整：JWT+角色鉴权+任务归属校验、BCrypt、异步状态机、失败留痕、Git 协作、规范文档</a:t>
             </a:r>
           </a:p>
           <a:p>
@@ -6184,6 +6218,23 @@
               </a:spcAft>
             </a:pPr>
             <a:r>
+              <a:rPr sz="1650" b="0">
+                <a:solidFill>
+                  <a:srgbClr val="1F2D3D"/>
+                </a:solidFill>
+                <a:latin typeface="微软雅黑"/>
+                <a:ea typeface="微软雅黑"/>
+              </a:rPr>
+              <a:t>▪ 轻量可复现：免深度学习训练、数据库内嵌免安装，普通 PC 双击即用</a:t>
+            </a:r>
+          </a:p>
+          <a:p>
+            <a:pPr algn="l">
+              <a:spcAft>
+                <a:spcPts val="1000"/>
+              </a:spcAft>
+            </a:pPr>
+            <a:r>
               <a:rPr sz="2000" b="1">
                 <a:solidFill>
                   <a:srgbClr val="E67E22"/>
@@ -6242,7 +6293,7 @@
                 <a:latin typeface="微软雅黑"/>
                 <a:ea typeface="微软雅黑"/>
               </a:rPr>
-              <a:t>▪ 小程序内画布框选目标；用户邮箱校验、审计日志、Docker 一键部署</a:t>
+              <a:t>▪ 框选交互增强（边角微调手柄）、结果图片一键下载、审计日志、Docker 一键部署</a:t>
             </a:r>
           </a:p>
         </p:txBody>
@@ -7057,7 +7108,7 @@
                 <a:latin typeface="微软雅黑"/>
                 <a:ea typeface="微软雅黑"/>
               </a:rPr>
-              <a:t>▪ ① 用户框选目标后持续跟踪并绘制轨迹；</a:t>
+              <a:t>▪ ① 用户在首帧画面上框选目标后持续跟踪并绘制轨迹（也可用自动识别目标）；</a:t>
             </a:r>
           </a:p>
           <a:p>
@@ -7091,7 +7142,7 @@
                 <a:latin typeface="微软雅黑"/>
                 <a:ea typeface="微软雅黑"/>
               </a:rPr>
-              <a:t>▪ ③ 跟踪结果（结果视频/轨迹/统计）可存储、查询、回看；管理员可管理用户与任务；</a:t>
+              <a:t>▪ ③ 跟踪结果（结果视频/结果图片/轨迹/统计）可存储、查询、回看；管理员可管理用户与任务；</a:t>
             </a:r>
           </a:p>
           <a:p>
@@ -7334,7 +7385,7 @@
                 <a:latin typeface="微软雅黑"/>
                 <a:ea typeface="微软雅黑"/>
               </a:rPr>
-              <a:t>四层架构：表现层（小程序/Web管理端）— 业务服务层（Spring Boot）— 视觉处理层（Python+OpenCV）— 数据层（MySQL+文件）</a:t>
+              <a:t>四层架构：表现层（小程序/Web管理端）— 业务服务层（Spring Boot）— 视觉处理层（Python+OpenCV）— 数据层（数据库+文件）</a:t>
             </a:r>
           </a:p>
           <a:p>
@@ -7693,7 +7744,7 @@
                 <a:latin typeface="微软雅黑"/>
                 <a:ea typeface="微软雅黑"/>
               </a:rPr>
-              <a:t>视觉：OpenCV CSRT + ORB/HSV 重检测 + FastAPI</a:t>
+              <a:t>视觉：OpenCV CSRT + 多尺度模板匹配/HSV 重检测 + FastAPI</a:t>
             </a:r>
           </a:p>
           <a:p>
@@ -7710,7 +7761,7 @@
                 <a:latin typeface="微软雅黑"/>
                 <a:ea typeface="微软雅黑"/>
               </a:rPr>
-              <a:t>数据：MySQL 8.0 + 磁盘文件（/files 映射）</a:t>
+              <a:t>数据：内嵌 H2（MySQL 兼容，免安装；可切 MySQL 8.0）+ 磁盘文件（/files 映射）</a:t>
             </a:r>
           </a:p>
           <a:p>
@@ -7994,7 +8045,7 @@
                 <a:latin typeface="微软雅黑"/>
                 <a:ea typeface="微软雅黑"/>
               </a:rPr>
-              <a:t>▪ 普通用户：注册 / 登录 / 改密 / 上传视频 / 结果回看 / 历史记录</a:t>
+              <a:t>▪ 普通用户：注册 / 登录 / 改密 / 上传视频或图片 / 首帧框选 / 结果回看 / 历史记录</a:t>
             </a:r>
           </a:p>
           <a:p>
@@ -8028,7 +8079,7 @@
                 <a:latin typeface="微软雅黑"/>
                 <a:ea typeface="微软雅黑"/>
               </a:rPr>
-              <a:t>▪ 视觉处理：CSRT 跟踪 + 遮挡检测 + 自动重检测恢复</a:t>
+              <a:t>▪ 视觉处理：CSRT 跟踪 + 运动目标自动识别 + 遮挡检测 + 自动重检测恢复</a:t>
             </a:r>
           </a:p>
           <a:p>
@@ -8045,7 +8096,7 @@
                 <a:latin typeface="微软雅黑"/>
                 <a:ea typeface="微软雅黑"/>
               </a:rPr>
-              <a:t>▪ 非功能：实时性(≥25FPS)、BCrypt+JWT 安全、异步任务状态机、失败留痕</a:t>
+              <a:t>▪ 非功能：实时性(≥25FPS)、BCrypt+JWT 安全、任务归属校验防越权、异步任务状态机、失败留痕</a:t>
             </a:r>
           </a:p>
         </p:txBody>
@@ -8312,7 +8363,7 @@
                 <a:latin typeface="微软雅黑"/>
                 <a:ea typeface="微软雅黑"/>
               </a:rPr>
-              <a:t>▪ 初始化：目标框 → 参考灰度模板 + HSV 直方图模型</a:t>
+              <a:t>▪ 初始化：目标框（框选/自动识别）→ 灰度模板 + HSV 直方图特征模型</a:t>
             </a:r>
           </a:p>
           <a:p>
@@ -8329,7 +8380,7 @@
                 <a:latin typeface="微软雅黑"/>
                 <a:ea typeface="微软雅黑"/>
               </a:rPr>
-              <a:t>▪ 正常跟踪：CSRT 逐帧更新</a:t>
+              <a:t>▪ 正常跟踪：CSRT 逐帧更新；自动识别用中值背景差运动检测</a:t>
             </a:r>
           </a:p>
           <a:p>
@@ -8346,7 +8397,7 @@
                 <a:latin typeface="微软雅黑"/>
                 <a:ea typeface="微软雅黑"/>
               </a:rPr>
-              <a:t>▪ 丢失判定：每5帧直方图相关度校验 + 越界检查，连续3帧确认</a:t>
+              <a:t>▪ 丢失判定：每5帧直方图相关度校验 + 逐帧越界检查，连续3次/3帧确认（防抖）</a:t>
             </a:r>
           </a:p>
           <a:p>
@@ -8380,7 +8431,7 @@
                 <a:latin typeface="微软雅黑"/>
                 <a:ea typeface="微软雅黑"/>
               </a:rPr>
-              <a:t>▪ 全程输出轨迹 / 状态 / 统计（丢失次数、恢复次数、FPS）</a:t>
+              <a:t>▪ 全程输出轨迹 / 状态 / 统计（丢失次数、恢复次数、FPS）；图片素材输出标注结果图</a:t>
             </a:r>
           </a:p>
         </p:txBody>
@@ -8945,7 +8996,7 @@
                 <a:latin typeface="微软雅黑"/>
                 <a:ea typeface="微软雅黑"/>
               </a:rPr>
-              <a:t>实测：目标被完全遮挡约0.9秒 → 系统丢失1次 → 自动找回1次 → 继续跟踪至视频结束</a:t>
+              <a:t>实测：目标被完全遮挡约0.9秒 → 系统丢失1次（第199帧）→ 自动找回1次（第262帧）→ 继续跟踪至视频结束</a:t>
             </a:r>
           </a:p>
         </p:txBody>
